--- a/fpga/sw/export/docs/slides/03_EDHOC_on_two_boards.pptx
+++ b/fpga/sw/export/docs/slides/03_EDHOC_on_two_boards.pptx
@@ -14599,7 +14599,7 @@
                           </a:solidFill>
                           <a:latin typeface="Times New Roman"/>
                         </a:rPr>
-                        <a:t>no PRK_out was printed (release builds of edhoc-wolfssl): no direct comparison</a:t>
+                        <a:t>no PRK_out was printed (every build without DEBUG=1, so the secret never reaches the console): no direct comparison</a:t>
                       </a:r>
                     </a:p>
                   </a:txBody>

--- a/fpga/sw/export/docs/slides/03_EDHOC_on_two_boards.pptx
+++ b/fpga/sw/export/docs/slides/03_EDHOC_on_two_boards.pptx
@@ -36448,7 +36448,7 @@
                 <a:latin typeface="Times New Roman"/>
                 <a:ea typeface="DejaVu Sans"/>
               </a:rPr>
-              <a:t>[YYYY/MM]</a:t>
+              <a:t>2026/12</a:t>
             </a:r>
             <a:endParaRPr lang="en-US" sz="3200" b="0" strike="noStrike" spc="-1" dirty="0">
               <a:latin typeface="Arial"/>
@@ -36612,7 +36612,7 @@
                 <a:latin typeface="Times New Roman"/>
                 <a:ea typeface="DejaVu Sans"/>
               </a:rPr>
-              <a:t>[YYYY/MM]</a:t>
+              <a:t>2026/12</a:t>
             </a:r>
             <a:endParaRPr lang="en-US" sz="3200" b="0" strike="noStrike" spc="-1" dirty="0">
               <a:latin typeface="Arial"/>
@@ -36714,7 +36714,7 @@
                 <a:latin typeface="Times New Roman"/>
                 <a:ea typeface="DejaVu Sans"/>
               </a:rPr>
-              <a:t>[Course name]</a:t>
+              <a:t>EDHOC on a Rocket RV64 SoC</a:t>
             </a:r>
             <a:r>
               <a:rPr lang="en-US" sz="4800" spc="-1" dirty="0">
@@ -36939,7 +36939,7 @@
                 <a:latin typeface="Times New Roman" panose="02020603050405020304" pitchFamily="18" charset="0"/>
                 <a:cs typeface="Times New Roman" panose="02020603050405020304" pitchFamily="18" charset="0"/>
               </a:rPr>
-              <a:t>[Author]</a:t>
+              <a:t>Khai-Duy Nguyen</a:t>
             </a:r>
           </a:p>
         </p:txBody>

--- a/fpga/sw/export/docs/slides/03_EDHOC_on_two_boards.pptx
+++ b/fpga/sw/export/docs/slides/03_EDHOC_on_two_boards.pptx
@@ -16047,7 +16047,7 @@
         <p:spPr>
           <a:xfrm>
             <a:off x="365760" y="868680"/>
-            <a:ext cx="11430000" cy="1130808"/>
+            <a:ext cx="11430000" cy="898397"/>
           </a:xfrm>
           <a:prstGeom prst="rect">
             <a:avLst/>
@@ -16088,7 +16088,7 @@
                 </a:solidFill>
                 <a:latin typeface="Consolas"/>
               </a:rPr>
-              <a:t>Run this — and the line it prints</a:t>
+              <a:t>Run this — from the repository root</a:t>
             </a:r>
           </a:p>
           <a:p>
@@ -16123,6 +16123,61 @@
               <a:t>make loopback-test CRYPTO_SUITE=24 METHOD=0</a:t>
             </a:r>
           </a:p>
+        </p:txBody>
+      </p:sp>
+      <p:sp>
+        <p:nvSpPr>
+          <p:cNvPr id="64" name="Rectangle 63"/>
+          <p:cNvSpPr/>
+          <p:nvPr/>
+        </p:nvSpPr>
+        <p:spPr>
+          <a:xfrm>
+            <a:off x="365760" y="1904237"/>
+            <a:ext cx="11430000" cy="548640"/>
+          </a:xfrm>
+          <a:prstGeom prst="rect">
+            <a:avLst/>
+          </a:prstGeom>
+          <a:solidFill>
+            <a:srgbClr val="1E1E1E"/>
+          </a:solidFill>
+          <a:ln>
+            <a:solidFill>
+              <a:srgbClr val="C8C8C8"/>
+            </a:solidFill>
+          </a:ln>
+          <a:effectLst/>
+        </p:spPr>
+        <p:style>
+          <a:lnRef idx="1">
+            <a:schemeClr val="accent1"/>
+          </a:lnRef>
+          <a:fillRef idx="3">
+            <a:schemeClr val="accent1"/>
+          </a:fillRef>
+          <a:effectRef idx="2">
+            <a:schemeClr val="accent1"/>
+          </a:effectRef>
+          <a:fontRef idx="minor">
+            <a:schemeClr val="lt1"/>
+          </a:fontRef>
+        </p:style>
+        <p:txBody>
+          <a:bodyPr rtlCol="0" anchor="t" wrap="none" lIns="73152" rIns="73152" tIns="73152" bIns="73152"/>
+          <a:lstStyle/>
+          <a:p>
+            <a:pPr algn="l"/>
+            <a:r>
+              <a:rPr sz="1180" b="1">
+                <a:solidFill>
+                  <a:srgbClr val="AAAAAA"/>
+                </a:solidFill>
+                <a:latin typeface="Consolas"/>
+              </a:rPr>
+              <a:t>Example output</a:t>
+            </a:r>
+          </a:p>
           <a:p>
             <a:pPr algn="l">
               <a:lnSpc>
@@ -16130,9 +16185,9 @@
               </a:lnSpc>
             </a:pPr>
             <a:r>
-              <a:rPr sz="1500">
-                <a:solidFill>
-                  <a:srgbClr val="1F1F1F"/>
+              <a:rPr sz="1180">
+                <a:solidFill>
+                  <a:srgbClr val="8BE98B"/>
                 </a:solidFill>
                 <a:latin typeface="Consolas"/>
               </a:rPr>
@@ -16143,13 +16198,13 @@
       </p:sp>
       <p:sp>
         <p:nvSpPr>
-          <p:cNvPr id="64" name="TextBox 63"/>
+          <p:cNvPr id="65" name="TextBox 64"/>
           <p:cNvSpPr txBox="1"/>
           <p:nvPr/>
         </p:nvSpPr>
         <p:spPr>
           <a:xfrm>
-            <a:off x="365760" y="2273807"/>
+            <a:off x="365760" y="2727196"/>
             <a:ext cx="11430000" cy="2286000"/>
           </a:xfrm>
           <a:prstGeom prst="rect">
@@ -32672,7 +32727,7 @@
                           </a:solidFill>
                           <a:latin typeface="Times New Roman"/>
                         </a:rPr>
-                        <a:t>42,291</a:t>
+                        <a:t>42,505</a:t>
                       </a:r>
                     </a:p>
                   </a:txBody>
@@ -32716,7 +32771,7 @@
                           </a:solidFill>
                           <a:latin typeface="Times New Roman"/>
                         </a:rPr>
-                        <a:t>47,667</a:t>
+                        <a:t>47,881</a:t>
                       </a:r>
                     </a:p>
                   </a:txBody>
@@ -32784,7 +32839,7 @@
                           </a:solidFill>
                           <a:latin typeface="Times New Roman"/>
                         </a:rPr>
-                        <a:t>43,739</a:t>
+                        <a:t>43,977</a:t>
                       </a:r>
                     </a:p>
                   </a:txBody>
@@ -32828,7 +32883,7 @@
                           </a:solidFill>
                           <a:latin typeface="Times New Roman"/>
                         </a:rPr>
-                        <a:t>52,187</a:t>
+                        <a:t>52,425</a:t>
                       </a:r>
                     </a:p>
                   </a:txBody>
@@ -32896,7 +32951,7 @@
                           </a:solidFill>
                           <a:latin typeface="Times New Roman"/>
                         </a:rPr>
-                        <a:t>41,653</a:t>
+                        <a:t>41,863</a:t>
                       </a:r>
                     </a:p>
                   </a:txBody>
@@ -32940,7 +32995,7 @@
                           </a:solidFill>
                           <a:latin typeface="Times New Roman"/>
                         </a:rPr>
-                        <a:t>47,029</a:t>
+                        <a:t>47,239</a:t>
                       </a:r>
                     </a:p>
                   </a:txBody>
@@ -33008,7 +33063,7 @@
                           </a:solidFill>
                           <a:latin typeface="Times New Roman"/>
                         </a:rPr>
-                        <a:t>43,365</a:t>
+                        <a:t>43,603</a:t>
                       </a:r>
                     </a:p>
                   </a:txBody>
@@ -33052,7 +33107,7 @@
                           </a:solidFill>
                           <a:latin typeface="Times New Roman"/>
                         </a:rPr>
-                        <a:t>51,813</a:t>
+                        <a:t>52,051</a:t>
                       </a:r>
                     </a:p>
                   </a:txBody>
@@ -33120,7 +33175,7 @@
                           </a:solidFill>
                           <a:latin typeface="Times New Roman"/>
                         </a:rPr>
-                        <a:t>46,361</a:t>
+                        <a:t>46,595</a:t>
                       </a:r>
                     </a:p>
                   </a:txBody>
@@ -33164,7 +33219,7 @@
                           </a:solidFill>
                           <a:latin typeface="Times New Roman"/>
                         </a:rPr>
-                        <a:t>54,809</a:t>
+                        <a:t>55,043</a:t>
                       </a:r>
                     </a:p>
                   </a:txBody>
@@ -33232,7 +33287,7 @@
                           </a:solidFill>
                           <a:latin typeface="Times New Roman"/>
                         </a:rPr>
-                        <a:t>47,391</a:t>
+                        <a:t>47,673</a:t>
                       </a:r>
                     </a:p>
                   </a:txBody>
@@ -33276,7 +33331,7 @@
                           </a:solidFill>
                           <a:latin typeface="Times New Roman"/>
                         </a:rPr>
-                        <a:t>58,399</a:t>
+                        <a:t>58,681</a:t>
                       </a:r>
                     </a:p>
                   </a:txBody>
@@ -33298,7 +33353,7 @@
                           </a:solidFill>
                           <a:latin typeface="Times New Roman"/>
                         </a:rPr>
-                        <a:t>89 %</a:t>
+                        <a:t>90 %</a:t>
                       </a:r>
                     </a:p>
                   </a:txBody>
@@ -33344,7 +33399,7 @@
                           </a:solidFill>
                           <a:latin typeface="Times New Roman"/>
                         </a:rPr>
-                        <a:t>47,913</a:t>
+                        <a:t>48,209</a:t>
                       </a:r>
                     </a:p>
                   </a:txBody>
@@ -33388,7 +33443,7 @@
                           </a:solidFill>
                           <a:latin typeface="Times New Roman"/>
                         </a:rPr>
-                        <a:t>60,457</a:t>
+                        <a:t>60,753</a:t>
                       </a:r>
                     </a:p>
                   </a:txBody>
@@ -33410,7 +33465,7 @@
                           </a:solidFill>
                           <a:latin typeface="Times New Roman"/>
                         </a:rPr>
-                        <a:t>92 %</a:t>
+                        <a:t>93 %</a:t>
                       </a:r>
                     </a:p>
                   </a:txBody>
@@ -33460,7 +33515,7 @@
                 </a:solidFill>
                 <a:latin typeface="Times New Roman"/>
               </a:rPr>
-              <a:t>Largest of the 8 builds per suite (4 methods × 2 roles). Stack reserve = measured peak + 25 %.</a:t>
+              <a:t>Per suite, the one of its 8 builds (4 methods × 2 roles) with the largest image + reserve; this revision, default flags (TRANSPORT=rf, no TIMING / DEBUG / APP options). Stack reserve = measured peak + 25 %.</a:t>
             </a:r>
           </a:p>
           <a:p>
@@ -33918,7 +33973,7 @@
                           </a:solidFill>
                           <a:latin typeface="Times New Roman"/>
                         </a:rPr>
-                        <a:t>60,457 B of 65,536 B (suite 25)</a:t>
+                        <a:t>60,753 B of 65,536 B (suite 25)</a:t>
                       </a:r>
                     </a:p>
                   </a:txBody>

--- a/fpga/sw/export/docs/slides/03_EDHOC_on_two_boards.pptx
+++ b/fpga/sw/export/docs/slides/03_EDHOC_on_two_boards.pptx
@@ -8361,7 +8361,7 @@
                 </a:solidFill>
                 <a:latin typeface="Times New Roman"/>
               </a:rPr>
-              <a:t>): OSCORE in the standard, our encrypted file channel in Lesson 5.</a:t>
+              <a:t>): OSCORE in the standard, the encrypted file channel in Lesson 5.</a:t>
             </a:r>
           </a:p>
         </p:txBody>
@@ -11749,7 +11749,7 @@
                 </a:solidFill>
                 <a:latin typeface="Times New Roman"/>
               </a:rPr>
-              <a:t>RFC 9528 §3.5 requires the application to see ID_CRED before it is trusted. Our library calls an optional </a:t>
+              <a:t>RFC 9528 §3.5 requires the application to see ID_CRED before it is trusted. The library calls an optional </a:t>
             </a:r>
             <a:r>
               <a:rPr sz="1600" b="0">
@@ -15312,7 +15312,7 @@
                           </a:solidFill>
                           <a:latin typeface="Times New Roman"/>
                         </a:rPr>
-                        <a:t>link lost after the handshake (Lesson 5, Problem 3)</a:t>
+                        <a:t>link lost after the handshake (Lesson 5, section 2, (7/8))</a:t>
                       </a:r>
                     </a:p>
                   </a:txBody>
@@ -18703,7 +18703,7 @@
                 </a:solidFill>
                 <a:latin typeface="Times New Roman"/>
               </a:rPr>
-              <a:t>our app key K_app</a:t>
+              <a:t>app key K_app</a:t>
             </a:r>
           </a:p>
           <a:p>
@@ -18806,7 +18806,7 @@
                 </a:solidFill>
                 <a:latin typeface="Times New Roman"/>
               </a:rPr>
-              <a:t>our app IV IV_app</a:t>
+              <a:t>app IV IV_app</a:t>
             </a:r>
           </a:p>
           <a:p>
@@ -18884,7 +18884,7 @@
                 </a:solidFill>
                 <a:latin typeface="Times New Roman"/>
               </a:rPr>
-              <a:t>Our demo first echoes three short messages (REQ/ECHO) both ways, then can stream a file (Lesson 5) with K_app / IV_app.</a:t>
+              <a:t>The demo first echoes three short messages (REQ/ECHO) both ways, then can stream a file (Lesson 5) with K_app / IV_app.</a:t>
             </a:r>
           </a:p>
           <a:p>
@@ -20676,7 +20676,7 @@
                 </a:solidFill>
                 <a:latin typeface="Times New Roman"/>
               </a:rPr>
-              <a:t>Our boards offer one suite, sent as a plain integer: </a:t>
+              <a:t>The demo boards offer one suite, sent as a plain integer: </a:t>
             </a:r>
             <a:r>
               <a:rPr sz="1600" b="0">
@@ -24890,7 +24890,7 @@
                           </a:solidFill>
                           <a:latin typeface="Times New Roman"/>
                         </a:rPr>
-                        <a:t>our own</a:t>
+                        <a:t>this tree</a:t>
                       </a:r>
                     </a:p>
                   </a:txBody>
@@ -25711,7 +25711,7 @@
                 </a:solidFill>
                 <a:latin typeface="Times New Roman"/>
               </a:rPr>
-              <a:t> = trust anchors: the credentials we accept.</a:t>
+              <a:t> = trust anchors: the credentials this board accepts.</a:t>
             </a:r>
           </a:p>
           <a:p>
@@ -25837,7 +25837,7 @@
                 <a:latin typeface="Times New Roman" panose="02020603050405020304" pitchFamily="18" charset="0"/>
                 <a:cs typeface="Times New Roman" panose="02020603050405020304" pitchFamily="18" charset="0"/>
               </a:rPr>
-              <a:t>(3/5) Made strict to RFC 9528</a:t>
+              <a:t>(3/5) Rules the library enforces</a:t>
             </a:r>
           </a:p>
         </p:txBody>
@@ -25910,7 +25910,7 @@
         </p:nvGraphicFramePr>
         <p:xfrm>
           <a:off x="365760" y="868680"/>
-          <a:ext cx="11429999" cy="4480560"/>
+          <a:ext cx="11430000" cy="4480560"/>
         </p:xfrm>
         <a:graphic>
           <a:graphicData uri="http://schemas.openxmlformats.org/drawingml/2006/table">
@@ -25919,9 +25919,8 @@
                 <a:tableStyleId>{5C22544A-7EE6-4342-B048-85BDC9FD1C3A}</a:tableStyleId>
               </a:tblPr>
               <a:tblGrid>
-                <a:gridCol w="4297680"/>
-                <a:gridCol w="3749039"/>
-                <a:gridCol w="3383280"/>
+                <a:gridCol w="6035040"/>
+                <a:gridCol w="5394960"/>
               </a:tblGrid>
               <a:tr h="497840">
                 <a:tc>
@@ -25958,29 +25957,7 @@
                           </a:solidFill>
                           <a:latin typeface="Times New Roman"/>
                         </a:rPr>
-                        <a:t>Before</a:t>
-                      </a:r>
-                    </a:p>
-                  </a:txBody>
-                  <a:tcPr marL="54864" marR="54864" marT="27432" marB="27432">
-                    <a:solidFill>
-                      <a:srgbClr val="C5E0B4"/>
-                    </a:solidFill>
-                  </a:tcPr>
-                </a:tc>
-                <a:tc>
-                  <a:txBody>
-                    <a:bodyPr wrap="square"/>
-                    <a:lstStyle/>
-                    <a:p>
-                      <a:r>
-                        <a:rPr sz="1500" b="1">
-                          <a:solidFill>
-                            <a:srgbClr val="000000"/>
-                          </a:solidFill>
-                          <a:latin typeface="Times New Roman"/>
-                        </a:rPr>
-                        <a:t>Now</a:t>
+                        <a:t>If a peer breaks it</a:t>
                       </a:r>
                     </a:p>
                   </a:txBody>
@@ -26004,7 +25981,7 @@
                           </a:solidFill>
                           <a:latin typeface="Times New Roman"/>
                         </a:rPr>
-                        <a:t>Deterministic CBOR (§3.1)</a:t>
+                        <a:t>Deterministic CBOR (§3.1): shortest form only</a:t>
                       </a:r>
                     </a:p>
                   </a:txBody>
@@ -26026,29 +26003,7 @@
                           </a:solidFill>
                           <a:latin typeface="Times New Roman"/>
                         </a:rPr>
-                        <a:t>accepted e.g. 19 00 03 for 3</a:t>
-                      </a:r>
-                    </a:p>
-                  </a:txBody>
-                  <a:tcPr marL="54864" marR="54864" marT="27432" marB="27432">
-                    <a:solidFill>
-                      <a:srgbClr val="FFFFFF"/>
-                    </a:solidFill>
-                  </a:tcPr>
-                </a:tc>
-                <a:tc>
-                  <a:txBody>
-                    <a:bodyPr wrap="square"/>
-                    <a:lstStyle/>
-                    <a:p>
-                      <a:r>
-                        <a:rPr sz="1500" b="0">
-                          <a:solidFill>
-                            <a:srgbClr val="000000"/>
-                          </a:solidFill>
-                          <a:latin typeface="Times New Roman"/>
-                        </a:rPr>
-                        <a:t>rejected</a:t>
+                        <a:t>message rejected (e.g. 19 00 03 for 3)</a:t>
                       </a:r>
                     </a:p>
                   </a:txBody>
@@ -26072,7 +26027,7 @@
                           </a:solidFill>
                           <a:latin typeface="Times New Roman"/>
                         </a:rPr>
-                        <a:t>SUITES_I: int or array of ≥ 2</a:t>
+                        <a:t>SUITES_I: an int, or an array of ≥ 2</a:t>
                       </a:r>
                     </a:p>
                   </a:txBody>
@@ -26094,29 +26049,7 @@
                           </a:solidFill>
                           <a:latin typeface="Times New Roman"/>
                         </a:rPr>
-                        <a:t>array of 1 accepted</a:t>
-                      </a:r>
-                    </a:p>
-                  </a:txBody>
-                  <a:tcPr marL="54864" marR="54864" marT="27432" marB="27432">
-                    <a:solidFill>
-                      <a:srgbClr val="F2F8EE"/>
-                    </a:solidFill>
-                  </a:tcPr>
-                </a:tc>
-                <a:tc>
-                  <a:txBody>
-                    <a:bodyPr wrap="square"/>
-                    <a:lstStyle/>
-                    <a:p>
-                      <a:r>
-                        <a:rPr sz="1500" b="0">
-                          <a:solidFill>
-                            <a:srgbClr val="000000"/>
-                          </a:solidFill>
-                          <a:latin typeface="Times New Roman"/>
-                        </a:rPr>
-                        <a:t>rejected</a:t>
+                        <a:t>message_1 rejected</a:t>
                       </a:r>
                     </a:p>
                   </a:txBody>
@@ -26140,7 +26073,7 @@
                           </a:solidFill>
                           <a:latin typeface="Times New Roman"/>
                         </a:rPr>
-                        <a:t>Compact C_x / kid (§3.3.2, §3.5.3.2)</a:t>
+                        <a:t>Compact C_x / kid as an int (§3.3.2, §3.5.3.2)</a:t>
                       </a:r>
                     </a:p>
                   </a:txBody>
@@ -26162,29 +26095,7 @@
                           </a:solidFill>
                           <a:latin typeface="Times New Roman"/>
                         </a:rPr>
-                        <a:t>loose</a:t>
-                      </a:r>
-                    </a:p>
-                  </a:txBody>
-                  <a:tcPr marL="54864" marR="54864" marT="27432" marB="27432">
-                    <a:solidFill>
-                      <a:srgbClr val="FFFFFF"/>
-                    </a:solidFill>
-                  </a:tcPr>
-                </a:tc>
-                <a:tc>
-                  <a:txBody>
-                    <a:bodyPr wrap="square"/>
-                    <a:lstStyle/>
-                    <a:p>
-                      <a:r>
-                        <a:rPr sz="1500" b="0">
-                          <a:solidFill>
-                            <a:srgbClr val="000000"/>
-                          </a:solidFill>
-                          <a:latin typeface="Times New Roman"/>
-                        </a:rPr>
-                        <a:t>int form required</a:t>
+                        <a:t>message rejected</a:t>
                       </a:r>
                     </a:p>
                   </a:txBody>
@@ -26208,7 +26119,7 @@
                           </a:solidFill>
                           <a:latin typeface="Times New Roman"/>
                         </a:rPr>
-                        <a:t>P-256/P-384: 0 ≤ x &lt; p (§9.2)</a:t>
+                        <a:t>P-256 / P-384 keys: 0 ≤ x &lt; p, on the curve (§9.2)</a:t>
                       </a:r>
                     </a:p>
                   </a:txBody>
@@ -26230,29 +26141,7 @@
                           </a:solidFill>
                           <a:latin typeface="Times New Roman"/>
                         </a:rPr>
-                        <a:t>x reduced mod p silently</a:t>
-                      </a:r>
-                    </a:p>
-                  </a:txBody>
-                  <a:tcPr marL="54864" marR="54864" marT="27432" marB="27432">
-                    <a:solidFill>
-                      <a:srgbClr val="F2F8EE"/>
-                    </a:solidFill>
-                  </a:tcPr>
-                </a:tc>
-                <a:tc>
-                  <a:txBody>
-                    <a:bodyPr wrap="square"/>
-                    <a:lstStyle/>
-                    <a:p>
-                      <a:r>
-                        <a:rPr sz="1500" b="0">
-                          <a:solidFill>
-                            <a:srgbClr val="000000"/>
-                          </a:solidFill>
-                          <a:latin typeface="Times New Roman"/>
-                        </a:rPr>
-                        <a:t>rejected</a:t>
+                        <a:t>message rejected</a:t>
                       </a:r>
                     </a:p>
                   </a:txBody>
@@ -26276,7 +26165,7 @@
                           </a:solidFill>
                           <a:latin typeface="Times New Roman"/>
                         </a:rPr>
-                        <a:t>kid is a byte string (COSE)</a:t>
+                        <a:t>kid is a byte string (COSE): {4: h'01'}</a:t>
                       </a:r>
                     </a:p>
                   </a:txBody>
@@ -26298,29 +26187,7 @@
                           </a:solidFill>
                           <a:latin typeface="Times New Roman"/>
                         </a:rPr>
-                        <a:t>{4: 1}</a:t>
-                      </a:r>
-                    </a:p>
-                  </a:txBody>
-                  <a:tcPr marL="54864" marR="54864" marT="27432" marB="27432">
-                    <a:solidFill>
-                      <a:srgbClr val="FFFFFF"/>
-                    </a:solidFill>
-                  </a:tcPr>
-                </a:tc>
-                <a:tc>
-                  <a:txBody>
-                    <a:bodyPr wrap="square"/>
-                    <a:lstStyle/>
-                    <a:p>
-                      <a:r>
-                        <a:rPr sz="1500" b="0">
-                          <a:solidFill>
-                            <a:srgbClr val="000000"/>
-                          </a:solidFill>
-                          <a:latin typeface="Times New Roman"/>
-                        </a:rPr>
-                        <a:t>{4: h'01'}</a:t>
+                        <a:t>{4: 1} is not accepted</a:t>
                       </a:r>
                     </a:p>
                   </a:txBody>
@@ -26366,29 +26233,7 @@
                           </a:solidFill>
                           <a:latin typeface="Times New Roman"/>
                         </a:rPr>
-                        <a:t>ignored</a:t>
-                      </a:r>
-                    </a:p>
-                  </a:txBody>
-                  <a:tcPr marL="54864" marR="54864" marT="27432" marB="27432">
-                    <a:solidFill>
-                      <a:srgbClr val="F2F8EE"/>
-                    </a:solidFill>
-                  </a:tcPr>
-                </a:tc>
-                <a:tc>
-                  <a:txBody>
-                    <a:bodyPr wrap="square"/>
-                    <a:lstStyle/>
-                    <a:p>
-                      <a:r>
-                        <a:rPr sz="1500" b="0">
-                          <a:solidFill>
-                            <a:srgbClr val="000000"/>
-                          </a:solidFill>
-                          <a:latin typeface="Times New Roman"/>
-                        </a:rPr>
-                        <a:t>error, handshake stops</a:t>
+                        <a:t>error message, handshake stops</a:t>
                       </a:r>
                     </a:p>
                   </a:txBody>
@@ -26412,7 +26257,7 @@
                           </a:solidFill>
                           <a:latin typeface="Times New Roman"/>
                         </a:rPr>
-                        <a:t>Static DH key with y = false</a:t>
+                        <a:t>Static DH keys use the even y (compact form)</a:t>
                       </a:r>
                     </a:p>
                   </a:txBody>
@@ -26434,29 +26279,7 @@
                           </a:solidFill>
                           <a:latin typeface="Times New Roman"/>
                         </a:rPr>
-                        <a:t>≈ 50 % had odd y</a:t>
-                      </a:r>
-                    </a:p>
-                  </a:txBody>
-                  <a:tcPr marL="54864" marR="54864" marT="27432" marB="27432">
-                    <a:solidFill>
-                      <a:srgbClr val="FFFFFF"/>
-                    </a:solidFill>
-                  </a:tcPr>
-                </a:tc>
-                <a:tc>
-                  <a:txBody>
-                    <a:bodyPr wrap="square"/>
-                    <a:lstStyle/>
-                    <a:p>
-                      <a:r>
-                        <a:rPr sz="1500" b="0">
-                          <a:solidFill>
-                            <a:srgbClr val="000000"/>
-                          </a:solidFill>
-                          <a:latin typeface="Times New Roman"/>
-                        </a:rPr>
-                        <a:t>always even y</a:t>
+                        <a:t>—  (the demo keys are generated so)</a:t>
                       </a:r>
                     </a:p>
                   </a:txBody>
@@ -26480,7 +26303,7 @@
                           </a:solidFill>
                           <a:latin typeface="Times New Roman"/>
                         </a:rPr>
-                        <a:t>ID_CRED to the application (§3.5)</a:t>
+                        <a:t>Application sees ID_CRED first (§3.5)</a:t>
                       </a:r>
                     </a:p>
                   </a:txBody>
@@ -26502,29 +26325,7 @@
                           </a:solidFill>
                           <a:latin typeface="Times New Roman"/>
                         </a:rPr>
-                        <a:t>not exposed</a:t>
-                      </a:r>
-                    </a:p>
-                  </a:txBody>
-                  <a:tcPr marL="54864" marR="54864" marT="27432" marB="27432">
-                    <a:solidFill>
-                      <a:srgbClr val="F2F8EE"/>
-                    </a:solidFill>
-                  </a:tcPr>
-                </a:tc>
-                <a:tc>
-                  <a:txBody>
-                    <a:bodyPr wrap="square"/>
-                    <a:lstStyle/>
-                    <a:p>
-                      <a:r>
-                        <a:rPr sz="1500" b="0">
-                          <a:solidFill>
-                            <a:srgbClr val="000000"/>
-                          </a:solidFill>
-                          <a:latin typeface="Times New Roman"/>
-                        </a:rPr>
-                        <a:t>id_cred_check() hook</a:t>
+                        <a:t>id_cred_check() can refuse it</a:t>
                       </a:r>
                     </a:p>
                   </a:txBody>
@@ -26573,7 +26374,25 @@
                 </a:solidFill>
                 <a:latin typeface="Times New Roman"/>
               </a:rPr>
-              <a:t>Found by running the RFC 9529 vectors and reading every MUST; all fixed. Builds from before these fixes do not interoperate with builds after them.</a:t>
+              <a:t>See each rule fail on purpose: </a:t>
+            </a:r>
+            <a:r>
+              <a:rPr sz="1400" b="0">
+                <a:solidFill>
+                  <a:srgbClr val="8B1A1A"/>
+                </a:solidFill>
+                <a:latin typeface="Consolas"/>
+              </a:rPr>
+              <a:t>make rfc9529-test</a:t>
+            </a:r>
+            <a:r>
+              <a:rPr sz="1600" b="0">
+                <a:solidFill>
+                  <a:srgbClr val="808080"/>
+                </a:solidFill>
+                <a:latin typeface="Times New Roman"/>
+              </a:rPr>
+              <a:t> feeds the 15 invalid messages of RFC 9529 and prints the error each one gets (next slide).</a:t>
             </a:r>
           </a:p>
         </p:txBody>
@@ -27074,7 +26893,7 @@
                 </a:solidFill>
                 <a:latin typeface="Times New Roman"/>
               </a:rPr>
-              <a:t>Our library, given the same keys and random values, must produce them </a:t>
+              <a:t>The library, given the same keys and random values, must produce them </a:t>
             </a:r>
             <a:r>
               <a:rPr sz="1600" b="1">

--- a/fpga/sw/export/docs/slides/03_EDHOC_on_two_boards.pptx
+++ b/fpga/sw/export/docs/slides/03_EDHOC_on_two_boards.pptx
@@ -12847,7 +12847,7 @@
                 </a:solidFill>
                 <a:latin typeface="Consolas"/>
               </a:rPr>
-              <a:t>cd fpga/sw/export/edhoc-wolfssl</a:t>
+              <a:t>cd $REPO/fpga/sw/export/edhoc-wolfssl</a:t>
             </a:r>
           </a:p>
           <a:p>
@@ -15610,7 +15610,7 @@
         <p:spPr>
           <a:xfrm>
             <a:off x="365760" y="868680"/>
-            <a:ext cx="11430000" cy="1719580"/>
+            <a:ext cx="11430000" cy="1936495"/>
           </a:xfrm>
           <a:prstGeom prst="rect">
             <a:avLst/>
@@ -15651,7 +15651,23 @@
                 </a:solidFill>
                 <a:latin typeface="Consolas"/>
               </a:rPr>
-              <a:t>Run this — from fpga/sw/export/edhoc-wolfssl, about 1 h</a:t>
+              <a:t>Run this — about 1 h</a:t>
+            </a:r>
+          </a:p>
+          <a:p>
+            <a:pPr algn="l">
+              <a:lnSpc>
+                <a:spcPct val="100000"/>
+              </a:lnSpc>
+            </a:pPr>
+            <a:r>
+              <a:rPr sz="1400">
+                <a:solidFill>
+                  <a:srgbClr val="1F1F1F"/>
+                </a:solidFill>
+                <a:latin typeface="Consolas"/>
+              </a:rPr>
+              <a:t>cd $REPO/fpga/sw/export/edhoc-wolfssl</a:t>
             </a:r>
           </a:p>
           <a:p>
@@ -15760,7 +15776,7 @@
         </p:nvSpPr>
         <p:spPr>
           <a:xfrm>
-            <a:off x="365760" y="2862580"/>
+            <a:off x="365760" y="3079495"/>
             <a:ext cx="11430000" cy="2194560"/>
           </a:xfrm>
           <a:prstGeom prst="rect">
@@ -16088,7 +16104,7 @@
                 </a:solidFill>
                 <a:latin typeface="Consolas"/>
               </a:rPr>
-              <a:t>Run this — from the repository root</a:t>
+              <a:t>Run this</a:t>
             </a:r>
           </a:p>
           <a:p>
@@ -16104,7 +16120,7 @@
                 </a:solidFill>
                 <a:latin typeface="Consolas"/>
               </a:rPr>
-              <a:t>cd fpga/sw/export/edhoc-wolfssl</a:t>
+              <a:t>cd $REPO/fpga/sw/export/edhoc-wolfssl</a:t>
             </a:r>
           </a:p>
           <a:p>
@@ -22999,7 +23015,7 @@
         <p:spPr>
           <a:xfrm>
             <a:off x="365760" y="2909824"/>
-            <a:ext cx="11430000" cy="1409699"/>
+            <a:ext cx="11430000" cy="1554480"/>
           </a:xfrm>
           <a:prstGeom prst="rect">
             <a:avLst/>
@@ -23034,13 +23050,13 @@
           <a:p>
             <a:pPr algn="l"/>
             <a:r>
-              <a:rPr sz="1300" b="1">
+              <a:rPr sz="1264" b="1">
                 <a:solidFill>
                   <a:srgbClr val="808080"/>
                 </a:solidFill>
                 <a:latin typeface="Consolas"/>
               </a:rPr>
-              <a:t>Run this — from fpga/sw/export/edhoc-wolfssl; prints the TH2 of the log</a:t>
+              <a:t>Run this — prints the TH2 of the log</a:t>
             </a:r>
           </a:p>
           <a:p>
@@ -23050,13 +23066,13 @@
               </a:lnSpc>
             </a:pPr>
             <a:r>
-              <a:rPr sz="1300">
+              <a:rPr sz="1264">
                 <a:solidFill>
                   <a:srgbClr val="1F1F1F"/>
                 </a:solidFill>
                 <a:latin typeface="Consolas"/>
               </a:rPr>
-              <a:t>make edhoc_m3_initiator edhoc_m3_responder CRYPTO_SUITE=2 DEBUG=1</a:t>
+              <a:t>cd $REPO/fpga/sw/export/edhoc-wolfssl</a:t>
             </a:r>
           </a:p>
           <a:p>
@@ -23066,13 +23082,13 @@
               </a:lnSpc>
             </a:pPr>
             <a:r>
-              <a:rPr sz="1300">
+              <a:rPr sz="1264">
                 <a:solidFill>
                   <a:srgbClr val="1F1F1F"/>
                 </a:solidFill>
                 <a:latin typeface="Consolas"/>
               </a:rPr>
-              <a:t>../common/board/run_pair.sh s2_m3 build/edhoc_m3_initiator.elf build/edhoc_m3_responder.elf</a:t>
+              <a:t>make edhoc_m3_initiator edhoc_m3_responder CRYPTO_SUITE=2 DEBUG=1</a:t>
             </a:r>
           </a:p>
           <a:p>
@@ -23082,13 +23098,13 @@
               </a:lnSpc>
             </a:pPr>
             <a:r>
-              <a:rPr sz="1300">
+              <a:rPr sz="1264">
                 <a:solidFill>
                   <a:srgbClr val="1F1F1F"/>
                 </a:solidFill>
                 <a:latin typeface="Consolas"/>
               </a:rPr>
-              <a:t>awk '/Input to calculate TH_2/{f=1;next} f&amp;&amp;/^ *[0-9A-F][0-9A-F] /{printf "%s",$0;next} f{exit}' \</a:t>
+              <a:t>../common/board/run_pair.sh s2_m3 build/edhoc_m3_initiator.elf build/edhoc_m3_responder.elf</a:t>
             </a:r>
           </a:p>
           <a:p>
@@ -23098,13 +23114,13 @@
               </a:lnSpc>
             </a:pPr>
             <a:r>
-              <a:rPr sz="1300">
+              <a:rPr sz="1264">
                 <a:solidFill>
                   <a:srgbClr val="1F1F1F"/>
                 </a:solidFill>
                 <a:latin typeface="Consolas"/>
               </a:rPr>
-              <a:t>    boardlogs/s2_m3.ini.log | tr -d ' ' | python3 -c \</a:t>
+              <a:t>awk '/Input to calculate TH_2/{f=1;next} f&amp;&amp;/^ *[0-9A-F][0-9A-F] /{printf "%s",$0;next} f{exit}' \</a:t>
             </a:r>
           </a:p>
           <a:p>
@@ -23114,7 +23130,23 @@
               </a:lnSpc>
             </a:pPr>
             <a:r>
-              <a:rPr sz="1300">
+              <a:rPr sz="1264">
+                <a:solidFill>
+                  <a:srgbClr val="1F1F1F"/>
+                </a:solidFill>
+                <a:latin typeface="Consolas"/>
+              </a:rPr>
+              <a:t>    boardlogs/s2_m3.ini.log | tr -d ' ' | python3 -c \</a:t>
+            </a:r>
+          </a:p>
+          <a:p>
+            <a:pPr algn="l">
+              <a:lnSpc>
+                <a:spcPct val="100000"/>
+              </a:lnSpc>
+            </a:pPr>
+            <a:r>
+              <a:rPr sz="1264">
                 <a:solidFill>
                   <a:srgbClr val="1F1F1F"/>
                 </a:solidFill>
@@ -23133,7 +23165,7 @@
         </p:nvSpPr>
         <p:spPr>
           <a:xfrm>
-            <a:off x="365760" y="4593843"/>
+            <a:off x="365760" y="4738624"/>
             <a:ext cx="11430000" cy="1828800"/>
           </a:xfrm>
           <a:prstGeom prst="rect">

--- a/fpga/sw/export/docs/slides/03_EDHOC_on_two_boards.pptx
+++ b/fpga/sw/export/docs/slides/03_EDHOC_on_two_boards.pptx
@@ -14897,7 +14897,7 @@
                 <a:latin typeface="Times New Roman" panose="02020603050405020304" pitchFamily="18" charset="0"/>
                 <a:cs typeface="Times New Roman" panose="02020603050405020304" pitchFamily="18" charset="0"/>
               </a:rPr>
-              <a:t>(5/7) If the pair fails</a:t>
+              <a:t>(5/7) Diagnosing a failed pair</a:t>
             </a:r>
           </a:p>
         </p:txBody>
